--- a/youtube_live/local/直播画面-PPT.pptx
+++ b/youtube_live/local/直播画面-PPT.pptx
@@ -5,8 +5,7 @@
     <p:sldMasterId id="2147483648" r:id="rId1"/>
   </p:sldMasterIdLst>
   <p:sldIdLst>
-    <p:sldId id="256" r:id="rId3"/>
-    <p:sldId id="257" r:id="rId4"/>
+    <p:sldId id="257" r:id="rId3"/>
   </p:sldIdLst>
   <p:sldSz cx="18288000" cy="10288270"/>
   <p:notesSz cx="6858000" cy="9144000"/>
@@ -3096,927 +3095,6 @@
         </p:blipFill>
         <p:spPr>
           <a:xfrm>
-            <a:off x="4576763" y="2572835"/>
-            <a:ext cx="9139238" cy="5143500"/>
-          </a:xfrm>
-          <a:prstGeom prst="rect">
-            <a:avLst/>
-          </a:prstGeom>
-        </p:spPr>
-      </p:pic>
-      <p:sp>
-        <p:nvSpPr>
-          <p:cNvPr id="19" name="NODE_NAME"/>
-          <p:cNvSpPr/>
-          <p:nvPr/>
-        </p:nvSpPr>
-        <p:spPr>
-          <a:xfrm>
-            <a:off x="6396990" y="2786671"/>
-            <a:ext cx="5501640" cy="935831"/>
-          </a:xfrm>
-          <a:prstGeom prst="rect">
-            <a:avLst/>
-          </a:prstGeom>
-          <a:noFill/>
-          <a:ln>
-            <a:noFill/>
-          </a:ln>
-        </p:spPr>
-        <p:txBody>
-          <a:bodyPr wrap="none" rtlCol="0" anchor="t">
-            <a:noAutofit/>
-          </a:bodyPr>
-          <a:p>
-            <a:pPr algn="ctr"/>
-            <a:r>
-              <a:rPr lang="zh-CN" altLang="en-US" sz="5400" b="1">
-                <a:solidFill>
-                  <a:schemeClr val="bg1"/>
-                </a:solidFill>
-                <a:effectLst>
-                  <a:reflection blurRad="6350" stA="53000" endA="300" endPos="35500" dir="5400000" sy="-90000" algn="bl" rotWithShape="0"/>
-                </a:effectLst>
-                <a:latin typeface="黑体" panose="02010609060101010101" charset="-122"/>
-                <a:ea typeface="黑体" panose="02010609060101010101" charset="-122"/>
-                <a:cs typeface="黑体" panose="02010609060101010101" charset="-122"/>
-              </a:rPr>
-              <a:t>🚀</a:t>
-            </a:r>
-            <a:r>
-              <a:rPr lang="en-US" altLang="zh-CN" sz="5400" b="1">
-                <a:solidFill>
-                  <a:schemeClr val="bg1"/>
-                </a:solidFill>
-                <a:effectLst>
-                  <a:reflection blurRad="6350" stA="53000" endA="300" endPos="35500" dir="5400000" sy="-90000" algn="bl" rotWithShape="0"/>
-                </a:effectLst>
-                <a:latin typeface="黑体" panose="02010609060101010101" charset="-122"/>
-                <a:ea typeface="黑体" panose="02010609060101010101" charset="-122"/>
-                <a:cs typeface="黑体" panose="02010609060101010101" charset="-122"/>
-              </a:rPr>
-              <a:t> </a:t>
-            </a:r>
-            <a:r>
-              <a:rPr lang="zh-CN" altLang="en-US" sz="5400" b="1">
-                <a:solidFill>
-                  <a:schemeClr val="bg1"/>
-                </a:solidFill>
-                <a:effectLst>
-                  <a:reflection blurRad="6350" stA="53000" endA="300" endPos="35500" dir="5400000" sy="-90000" algn="bl" rotWithShape="0"/>
-                </a:effectLst>
-                <a:latin typeface="黑体" panose="02010609060101010101" charset="-122"/>
-                <a:ea typeface="黑体" panose="02010609060101010101" charset="-122"/>
-                <a:cs typeface="黑体" panose="02010609060101010101" charset="-122"/>
-              </a:rPr>
-              <a:t>免费节点</a:t>
-            </a:r>
-            <a:r>
-              <a:rPr lang="en-US" altLang="zh-CN" sz="5400" b="1">
-                <a:solidFill>
-                  <a:schemeClr val="accent4">
-                    <a:lumMod val="20000"/>
-                    <a:lumOff val="80000"/>
-                  </a:schemeClr>
-                </a:solidFill>
-                <a:effectLst>
-                  <a:reflection blurRad="6350" stA="53000" endA="300" endPos="35500" dir="5400000" sy="-90000" algn="bl" rotWithShape="0"/>
-                </a:effectLst>
-                <a:latin typeface="黑体" panose="02010609060101010101" charset="-122"/>
-                <a:ea typeface="黑体" panose="02010609060101010101" charset="-122"/>
-                <a:cs typeface="黑体" panose="02010609060101010101" charset="-122"/>
-              </a:rPr>
-              <a:t> </a:t>
-            </a:r>
-            <a:r>
-              <a:rPr lang="zh-CN" altLang="en-US" sz="5400" b="1">
-                <a:solidFill>
-                  <a:srgbClr val="FFFF00"/>
-                </a:solidFill>
-                <a:effectLst>
-                  <a:reflection blurRad="6350" stA="53000" endA="300" endPos="35500" dir="5400000" sy="-90000" algn="bl" rotWithShape="0"/>
-                </a:effectLst>
-                <a:latin typeface="黑体" panose="02010609060101010101" charset="-122"/>
-                <a:ea typeface="黑体" panose="02010609060101010101" charset="-122"/>
-                <a:cs typeface="黑体" panose="02010609060101010101" charset="-122"/>
-              </a:rPr>
-              <a:t>分享</a:t>
-            </a:r>
-            <a:endParaRPr lang="zh-CN" altLang="en-US" sz="5400" b="1">
-              <a:solidFill>
-                <a:srgbClr val="FFFF00"/>
-              </a:solidFill>
-              <a:effectLst>
-                <a:reflection blurRad="6350" stA="53000" endA="300" endPos="35500" dir="5400000" sy="-90000" algn="bl" rotWithShape="0"/>
-              </a:effectLst>
-              <a:latin typeface="黑体" panose="02010609060101010101" charset="-122"/>
-              <a:ea typeface="黑体" panose="02010609060101010101" charset="-122"/>
-              <a:cs typeface="黑体" panose="02010609060101010101" charset="-122"/>
-            </a:endParaRPr>
-          </a:p>
-        </p:txBody>
-      </p:sp>
-      <p:sp>
-        <p:nvSpPr>
-          <p:cNvPr id="23" name="矩形 22"/>
-          <p:cNvSpPr/>
-          <p:nvPr/>
-        </p:nvSpPr>
-        <p:spPr>
-          <a:xfrm>
-            <a:off x="4572000" y="7091495"/>
-            <a:ext cx="9139714" cy="624840"/>
-          </a:xfrm>
-          <a:prstGeom prst="rect">
-            <a:avLst/>
-          </a:prstGeom>
-          <a:solidFill>
-            <a:schemeClr val="accent5">
-              <a:alpha val="17000"/>
-            </a:schemeClr>
-          </a:solidFill>
-          <a:ln>
-            <a:noFill/>
-          </a:ln>
-        </p:spPr>
-        <p:style>
-          <a:lnRef idx="2">
-            <a:schemeClr val="accent1">
-              <a:lumMod val="75000"/>
-            </a:schemeClr>
-          </a:lnRef>
-          <a:fillRef idx="1">
-            <a:schemeClr val="accent1"/>
-          </a:fillRef>
-          <a:effectRef idx="0">
-            <a:srgbClr val="FFFFFF"/>
-          </a:effectRef>
-          <a:fontRef idx="minor">
-            <a:schemeClr val="lt1"/>
-          </a:fontRef>
-        </p:style>
-        <p:txBody>
-          <a:bodyPr rtlCol="0" anchor="ctr"/>
-          <a:p>
-            <a:pPr algn="ctr"/>
-            <a:endParaRPr lang="zh-CN" altLang="en-US" sz="1350"/>
-          </a:p>
-        </p:txBody>
-      </p:sp>
-      <p:sp>
-        <p:nvSpPr>
-          <p:cNvPr id="25" name="圆角矩形 24"/>
-          <p:cNvSpPr/>
-          <p:nvPr/>
-        </p:nvSpPr>
-        <p:spPr>
-          <a:xfrm>
-            <a:off x="5982176" y="3847280"/>
-            <a:ext cx="2806065" cy="2839403"/>
-          </a:xfrm>
-          <a:prstGeom prst="roundRect">
-            <a:avLst>
-              <a:gd name="adj" fmla="val 7982"/>
-            </a:avLst>
-          </a:prstGeom>
-          <a:solidFill>
-            <a:schemeClr val="bg2">
-              <a:alpha val="36000"/>
-            </a:schemeClr>
-          </a:solidFill>
-          <a:ln>
-            <a:noFill/>
-          </a:ln>
-        </p:spPr>
-        <p:style>
-          <a:lnRef idx="2">
-            <a:schemeClr val="accent1">
-              <a:lumMod val="75000"/>
-            </a:schemeClr>
-          </a:lnRef>
-          <a:fillRef idx="1">
-            <a:schemeClr val="accent1"/>
-          </a:fillRef>
-          <a:effectRef idx="0">
-            <a:srgbClr val="FFFFFF"/>
-          </a:effectRef>
-          <a:fontRef idx="minor">
-            <a:schemeClr val="lt1"/>
-          </a:fontRef>
-        </p:style>
-        <p:txBody>
-          <a:bodyPr rtlCol="0" anchor="ctr"/>
-          <a:p>
-            <a:pPr algn="ctr"/>
-            <a:endParaRPr lang="zh-CN" altLang="en-US" sz="1350"/>
-          </a:p>
-        </p:txBody>
-      </p:sp>
-      <p:sp>
-        <p:nvSpPr>
-          <p:cNvPr id="27" name="文本框 26"/>
-          <p:cNvSpPr txBox="1"/>
-          <p:nvPr/>
-        </p:nvSpPr>
-        <p:spPr>
-          <a:xfrm>
-            <a:off x="5982176" y="5528442"/>
-            <a:ext cx="2806065" cy="1004888"/>
-          </a:xfrm>
-          <a:prstGeom prst="rect">
-            <a:avLst/>
-          </a:prstGeom>
-          <a:effectLst>
-            <a:softEdge rad="50800"/>
-          </a:effectLst>
-        </p:spPr>
-        <p:style>
-          <a:lnRef idx="0">
-            <a:srgbClr val="FFFFFF"/>
-          </a:lnRef>
-          <a:fillRef idx="1">
-            <a:schemeClr val="accent4"/>
-          </a:fillRef>
-          <a:effectRef idx="0">
-            <a:srgbClr val="FFFFFF"/>
-          </a:effectRef>
-          <a:fontRef idx="minor">
-            <a:schemeClr val="lt1"/>
-          </a:fontRef>
-        </p:style>
-        <p:txBody>
-          <a:bodyPr wrap="square" rtlCol="0">
-            <a:noAutofit/>
-          </a:bodyPr>
-          <a:p>
-            <a:pPr algn="ctr">
-              <a:lnSpc>
-                <a:spcPct val="150000"/>
-              </a:lnSpc>
-            </a:pPr>
-            <a:r>
-              <a:rPr lang="zh-CN" altLang="en-US" b="1">
-                <a:solidFill>
-                  <a:schemeClr val="tx1"/>
-                </a:solidFill>
-                <a:effectLst>
-                  <a:outerShdw blurRad="50800" dist="38100" dir="18900000" algn="bl" rotWithShape="0">
-                    <a:prstClr val="black">
-                      <a:alpha val="40000"/>
-                    </a:prstClr>
-                  </a:outerShdw>
-                </a:effectLst>
-              </a:rPr>
-              <a:t>扫描屏幕上二维码</a:t>
-            </a:r>
-            <a:br>
-              <a:rPr lang="zh-CN" altLang="en-US" b="1">
-                <a:solidFill>
-                  <a:schemeClr val="tx1"/>
-                </a:solidFill>
-                <a:effectLst>
-                  <a:outerShdw blurRad="50800" dist="38100" dir="18900000" algn="bl" rotWithShape="0">
-                    <a:prstClr val="black">
-                      <a:alpha val="40000"/>
-                    </a:prstClr>
-                  </a:outerShdw>
-                </a:effectLst>
-              </a:rPr>
-            </a:br>
-            <a:r>
-              <a:rPr lang="zh-CN" altLang="en-US" b="1">
-                <a:solidFill>
-                  <a:schemeClr val="tx1"/>
-                </a:solidFill>
-                <a:effectLst>
-                  <a:outerShdw blurRad="50800" dist="38100" dir="18900000" algn="bl" rotWithShape="0">
-                    <a:prstClr val="black">
-                      <a:alpha val="40000"/>
-                    </a:prstClr>
-                  </a:outerShdw>
-                </a:effectLst>
-              </a:rPr>
-              <a:t>导入节点即可使用</a:t>
-            </a:r>
-            <a:endParaRPr lang="zh-CN" altLang="en-US" b="1">
-              <a:solidFill>
-                <a:schemeClr val="tx1"/>
-              </a:solidFill>
-              <a:effectLst>
-                <a:outerShdw blurRad="50800" dist="38100" dir="18900000" algn="bl" rotWithShape="0">
-                  <a:prstClr val="black">
-                    <a:alpha val="40000"/>
-                  </a:prstClr>
-                </a:outerShdw>
-              </a:effectLst>
-            </a:endParaRPr>
-          </a:p>
-        </p:txBody>
-      </p:sp>
-      <p:sp>
-        <p:nvSpPr>
-          <p:cNvPr id="32" name="矩形 31"/>
-          <p:cNvSpPr/>
-          <p:nvPr/>
-        </p:nvSpPr>
-        <p:spPr>
-          <a:xfrm>
-            <a:off x="5982176" y="4060640"/>
-            <a:ext cx="2711768" cy="1672114"/>
-          </a:xfrm>
-          <a:prstGeom prst="rect">
-            <a:avLst/>
-          </a:prstGeom>
-          <a:noFill/>
-          <a:ln>
-            <a:noFill/>
-          </a:ln>
-        </p:spPr>
-        <p:txBody>
-          <a:bodyPr wrap="none" rtlCol="0" anchor="t">
-            <a:noAutofit/>
-            <a:scene3d>
-              <a:camera prst="orthographicFront"/>
-              <a:lightRig rig="threePt" dir="t"/>
-            </a:scene3d>
-          </a:bodyPr>
-          <a:p>
-            <a:pPr indent="0" algn="l" fontAlgn="auto">
-              <a:spcBef>
-                <a:spcPts val="1200"/>
-              </a:spcBef>
-            </a:pPr>
-            <a:r>
-              <a:rPr lang="zh-CN" altLang="en-US" b="1">
-                <a:ln>
-                  <a:noFill/>
-                </a:ln>
-                <a:solidFill>
-                  <a:schemeClr val="tx1"/>
-                </a:solidFill>
-                <a:effectLst>
-                  <a:outerShdw blurRad="38100" dist="19050" dir="2700000" algn="tl" rotWithShape="0">
-                    <a:schemeClr val="dk1">
-                      <a:alpha val="40000"/>
-                    </a:schemeClr>
-                  </a:outerShdw>
-                </a:effectLst>
-                <a:latin typeface="仿宋" panose="02010609060101010101" charset="-122"/>
-                <a:ea typeface="仿宋" panose="02010609060101010101" charset="-122"/>
-                <a:cs typeface="仿宋" panose="02010609060101010101" charset="-122"/>
-              </a:rPr>
-              <a:t>服务器：</a:t>
-            </a:r>
-            <a:endParaRPr lang="zh-CN" altLang="en-US" b="1">
-              <a:ln>
-                <a:noFill/>
-              </a:ln>
-              <a:solidFill>
-                <a:schemeClr val="tx1"/>
-              </a:solidFill>
-              <a:effectLst>
-                <a:outerShdw blurRad="38100" dist="19050" dir="2700000" algn="tl" rotWithShape="0">
-                  <a:schemeClr val="dk1">
-                    <a:alpha val="40000"/>
-                  </a:schemeClr>
-                </a:outerShdw>
-              </a:effectLst>
-              <a:latin typeface="仿宋" panose="02010609060101010101" charset="-122"/>
-              <a:ea typeface="仿宋" panose="02010609060101010101" charset="-122"/>
-              <a:cs typeface="仿宋" panose="02010609060101010101" charset="-122"/>
-            </a:endParaRPr>
-          </a:p>
-          <a:p>
-            <a:pPr indent="0" algn="l" fontAlgn="auto">
-              <a:spcBef>
-                <a:spcPts val="1200"/>
-              </a:spcBef>
-            </a:pPr>
-            <a:r>
-              <a:rPr lang="zh-CN" altLang="en-US" b="1">
-                <a:ln>
-                  <a:noFill/>
-                </a:ln>
-                <a:solidFill>
-                  <a:schemeClr val="tx1"/>
-                </a:solidFill>
-                <a:effectLst>
-                  <a:outerShdw blurRad="38100" dist="19050" dir="2700000" algn="tl" rotWithShape="0">
-                    <a:schemeClr val="dk1">
-                      <a:alpha val="40000"/>
-                    </a:schemeClr>
-                  </a:outerShdw>
-                </a:effectLst>
-                <a:latin typeface="仿宋" panose="02010609060101010101" charset="-122"/>
-                <a:ea typeface="仿宋" panose="02010609060101010101" charset="-122"/>
-                <a:cs typeface="仿宋" panose="02010609060101010101" charset="-122"/>
-              </a:rPr>
-              <a:t>地</a:t>
-            </a:r>
-            <a:r>
-              <a:rPr lang="en-US" altLang="zh-CN" b="1">
-                <a:ln>
-                  <a:noFill/>
-                </a:ln>
-                <a:solidFill>
-                  <a:schemeClr val="tx1"/>
-                </a:solidFill>
-                <a:effectLst>
-                  <a:outerShdw blurRad="38100" dist="19050" dir="2700000" algn="tl" rotWithShape="0">
-                    <a:schemeClr val="dk1">
-                      <a:alpha val="40000"/>
-                    </a:schemeClr>
-                  </a:outerShdw>
-                </a:effectLst>
-                <a:latin typeface="仿宋" panose="02010609060101010101" charset="-122"/>
-                <a:ea typeface="仿宋" panose="02010609060101010101" charset="-122"/>
-                <a:cs typeface="仿宋" panose="02010609060101010101" charset="-122"/>
-              </a:rPr>
-              <a:t>  </a:t>
-            </a:r>
-            <a:r>
-              <a:rPr lang="zh-CN" altLang="en-US" b="1">
-                <a:ln>
-                  <a:noFill/>
-                </a:ln>
-                <a:solidFill>
-                  <a:schemeClr val="tx1"/>
-                </a:solidFill>
-                <a:effectLst>
-                  <a:outerShdw blurRad="38100" dist="19050" dir="2700000" algn="tl" rotWithShape="0">
-                    <a:schemeClr val="dk1">
-                      <a:alpha val="40000"/>
-                    </a:schemeClr>
-                  </a:outerShdw>
-                </a:effectLst>
-                <a:latin typeface="仿宋" panose="02010609060101010101" charset="-122"/>
-                <a:ea typeface="仿宋" panose="02010609060101010101" charset="-122"/>
-                <a:cs typeface="仿宋" panose="02010609060101010101" charset="-122"/>
-              </a:rPr>
-              <a:t>区：</a:t>
-            </a:r>
-            <a:endParaRPr lang="zh-CN" altLang="en-US" b="1">
-              <a:ln>
-                <a:noFill/>
-              </a:ln>
-              <a:solidFill>
-                <a:schemeClr val="tx1"/>
-              </a:solidFill>
-              <a:effectLst>
-                <a:outerShdw blurRad="38100" dist="19050" dir="2700000" algn="tl" rotWithShape="0">
-                  <a:schemeClr val="dk1">
-                    <a:alpha val="40000"/>
-                  </a:schemeClr>
-                </a:outerShdw>
-              </a:effectLst>
-              <a:latin typeface="仿宋" panose="02010609060101010101" charset="-122"/>
-              <a:ea typeface="仿宋" panose="02010609060101010101" charset="-122"/>
-              <a:cs typeface="仿宋" panose="02010609060101010101" charset="-122"/>
-            </a:endParaRPr>
-          </a:p>
-          <a:p>
-            <a:pPr indent="0" algn="l" fontAlgn="auto">
-              <a:spcBef>
-                <a:spcPts val="1200"/>
-              </a:spcBef>
-            </a:pPr>
-            <a:r>
-              <a:rPr lang="zh-CN" altLang="en-US" b="1">
-                <a:ln>
-                  <a:noFill/>
-                </a:ln>
-                <a:solidFill>
-                  <a:schemeClr val="tx1"/>
-                </a:solidFill>
-                <a:effectLst>
-                  <a:outerShdw blurRad="38100" dist="19050" dir="2700000" algn="tl" rotWithShape="0">
-                    <a:schemeClr val="dk1">
-                      <a:alpha val="40000"/>
-                    </a:schemeClr>
-                  </a:outerShdw>
-                </a:effectLst>
-                <a:latin typeface="仿宋" panose="02010609060101010101" charset="-122"/>
-                <a:ea typeface="仿宋" panose="02010609060101010101" charset="-122"/>
-                <a:cs typeface="仿宋" panose="02010609060101010101" charset="-122"/>
-              </a:rPr>
-              <a:t>速</a:t>
-            </a:r>
-            <a:r>
-              <a:rPr lang="en-US" altLang="zh-CN" b="1">
-                <a:ln>
-                  <a:noFill/>
-                </a:ln>
-                <a:solidFill>
-                  <a:schemeClr val="tx1"/>
-                </a:solidFill>
-                <a:effectLst>
-                  <a:outerShdw blurRad="38100" dist="19050" dir="2700000" algn="tl" rotWithShape="0">
-                    <a:schemeClr val="dk1">
-                      <a:alpha val="40000"/>
-                    </a:schemeClr>
-                  </a:outerShdw>
-                </a:effectLst>
-                <a:latin typeface="仿宋" panose="02010609060101010101" charset="-122"/>
-                <a:ea typeface="仿宋" panose="02010609060101010101" charset="-122"/>
-                <a:cs typeface="仿宋" panose="02010609060101010101" charset="-122"/>
-              </a:rPr>
-              <a:t>  </a:t>
-            </a:r>
-            <a:r>
-              <a:rPr lang="zh-CN" altLang="en-US" b="1">
-                <a:ln>
-                  <a:noFill/>
-                </a:ln>
-                <a:solidFill>
-                  <a:schemeClr val="tx1"/>
-                </a:solidFill>
-                <a:effectLst>
-                  <a:outerShdw blurRad="38100" dist="19050" dir="2700000" algn="tl" rotWithShape="0">
-                    <a:schemeClr val="dk1">
-                      <a:alpha val="40000"/>
-                    </a:schemeClr>
-                  </a:outerShdw>
-                </a:effectLst>
-                <a:latin typeface="仿宋" panose="02010609060101010101" charset="-122"/>
-                <a:ea typeface="仿宋" panose="02010609060101010101" charset="-122"/>
-                <a:cs typeface="仿宋" panose="02010609060101010101" charset="-122"/>
-              </a:rPr>
-              <a:t>度：</a:t>
-            </a:r>
-            <a:endParaRPr lang="zh-CN" altLang="en-US" b="1">
-              <a:ln>
-                <a:noFill/>
-              </a:ln>
-              <a:solidFill>
-                <a:schemeClr val="tx1"/>
-              </a:solidFill>
-              <a:effectLst>
-                <a:outerShdw blurRad="38100" dist="19050" dir="2700000" algn="tl" rotWithShape="0">
-                  <a:schemeClr val="dk1">
-                    <a:alpha val="40000"/>
-                  </a:schemeClr>
-                </a:outerShdw>
-              </a:effectLst>
-              <a:latin typeface="仿宋" panose="02010609060101010101" charset="-122"/>
-              <a:ea typeface="仿宋" panose="02010609060101010101" charset="-122"/>
-              <a:cs typeface="仿宋" panose="02010609060101010101" charset="-122"/>
-            </a:endParaRPr>
-          </a:p>
-        </p:txBody>
-      </p:sp>
-      <p:sp>
-        <p:nvSpPr>
-          <p:cNvPr id="35" name="矩形 34"/>
-          <p:cNvSpPr/>
-          <p:nvPr/>
-        </p:nvSpPr>
-        <p:spPr>
-          <a:xfrm>
-            <a:off x="10178891" y="7160551"/>
-            <a:ext cx="3532346" cy="541496"/>
-          </a:xfrm>
-          <a:prstGeom prst="rect">
-            <a:avLst/>
-          </a:prstGeom>
-          <a:noFill/>
-          <a:ln>
-            <a:noFill/>
-          </a:ln>
-        </p:spPr>
-        <p:txBody>
-          <a:bodyPr wrap="none" rtlCol="0" anchor="t">
-            <a:noAutofit/>
-            <a:scene3d>
-              <a:camera prst="orthographicFront"/>
-              <a:lightRig rig="threePt" dir="t"/>
-            </a:scene3d>
-          </a:bodyPr>
-          <a:p>
-            <a:pPr indent="0" algn="l" fontAlgn="auto">
-              <a:spcBef>
-                <a:spcPts val="1200"/>
-              </a:spcBef>
-            </a:pPr>
-            <a:r>
-              <a:rPr lang="zh-CN" altLang="en-US" sz="3000">
-                <a:ln>
-                  <a:noFill/>
-                </a:ln>
-                <a:solidFill>
-                  <a:schemeClr val="bg2">
-                    <a:lumMod val="90000"/>
-                  </a:schemeClr>
-                </a:solidFill>
-                <a:effectLst>
-                  <a:outerShdw blurRad="38100" dist="19050" dir="2700000" algn="tl" rotWithShape="0">
-                    <a:schemeClr val="dk1">
-                      <a:alpha val="40000"/>
-                    </a:schemeClr>
-                  </a:outerShdw>
-                </a:effectLst>
-                <a:latin typeface="仿宋" panose="02010609060101010101" charset="-122"/>
-                <a:ea typeface="仿宋" panose="02010609060101010101" charset="-122"/>
-                <a:cs typeface="仿宋" panose="02010609060101010101" charset="-122"/>
-              </a:rPr>
-              <a:t>资源来自公共互联网</a:t>
-            </a:r>
-            <a:endParaRPr lang="zh-CN" altLang="en-US" sz="3000">
-              <a:ln>
-                <a:noFill/>
-              </a:ln>
-              <a:solidFill>
-                <a:schemeClr val="bg2">
-                  <a:lumMod val="90000"/>
-                </a:schemeClr>
-              </a:solidFill>
-              <a:effectLst>
-                <a:outerShdw blurRad="38100" dist="19050" dir="2700000" algn="tl" rotWithShape="0">
-                  <a:schemeClr val="dk1">
-                    <a:alpha val="40000"/>
-                  </a:schemeClr>
-                </a:outerShdw>
-              </a:effectLst>
-              <a:latin typeface="仿宋" panose="02010609060101010101" charset="-122"/>
-              <a:ea typeface="仿宋" panose="02010609060101010101" charset="-122"/>
-              <a:cs typeface="仿宋" panose="02010609060101010101" charset="-122"/>
-            </a:endParaRPr>
-          </a:p>
-        </p:txBody>
-      </p:sp>
-      <p:pic>
-        <p:nvPicPr>
-          <p:cNvPr id="37" name="图片 36" descr="小V头像_750K"/>
-          <p:cNvPicPr>
-            <a:picLocks noChangeAspect="1"/>
-          </p:cNvPicPr>
-          <p:nvPr/>
-        </p:nvPicPr>
-        <p:blipFill>
-          <a:blip r:embed="rId2"/>
-          <a:stretch>
-            <a:fillRect/>
-          </a:stretch>
-        </p:blipFill>
-        <p:spPr>
-          <a:xfrm>
-            <a:off x="4659154" y="7160551"/>
-            <a:ext cx="491014" cy="491014"/>
-          </a:xfrm>
-          <a:prstGeom prst="roundRect">
-            <a:avLst>
-              <a:gd name="adj" fmla="val 28128"/>
-            </a:avLst>
-          </a:prstGeom>
-        </p:spPr>
-      </p:pic>
-      <p:sp>
-        <p:nvSpPr>
-          <p:cNvPr id="45" name="圆角矩形 44"/>
-          <p:cNvSpPr/>
-          <p:nvPr/>
-        </p:nvSpPr>
-        <p:spPr>
-          <a:xfrm>
-            <a:off x="9349264" y="3847280"/>
-            <a:ext cx="2806065" cy="2839403"/>
-          </a:xfrm>
-          <a:prstGeom prst="roundRect">
-            <a:avLst>
-              <a:gd name="adj" fmla="val 7982"/>
-            </a:avLst>
-          </a:prstGeom>
-          <a:solidFill>
-            <a:schemeClr val="bg2">
-              <a:alpha val="36000"/>
-            </a:schemeClr>
-          </a:solidFill>
-          <a:ln>
-            <a:noFill/>
-          </a:ln>
-        </p:spPr>
-        <p:style>
-          <a:lnRef idx="2">
-            <a:schemeClr val="accent1">
-              <a:lumMod val="75000"/>
-            </a:schemeClr>
-          </a:lnRef>
-          <a:fillRef idx="1">
-            <a:schemeClr val="accent1"/>
-          </a:fillRef>
-          <a:effectRef idx="0">
-            <a:srgbClr val="FFFFFF"/>
-          </a:effectRef>
-          <a:fontRef idx="minor">
-            <a:schemeClr val="lt1"/>
-          </a:fontRef>
-        </p:style>
-        <p:txBody>
-          <a:bodyPr rtlCol="0" anchor="ctr"/>
-          <a:p>
-            <a:pPr algn="ctr"/>
-            <a:endParaRPr lang="zh-CN" altLang="en-US" sz="1350"/>
-          </a:p>
-        </p:txBody>
-      </p:sp>
-      <p:graphicFrame>
-        <p:nvGraphicFramePr>
-          <p:cNvPr id="6" name="对象 5"/>
-          <p:cNvGraphicFramePr>
-            <a:graphicFrameLocks noChangeAspect="1"/>
-          </p:cNvGraphicFramePr>
-          <p:nvPr/>
-        </p:nvGraphicFramePr>
-        <p:xfrm>
-          <a:off x="9504918" y="4018889"/>
-          <a:ext cx="2494280" cy="2499995"/>
-        </p:xfrm>
-        <a:graphic>
-          <a:graphicData uri="http://schemas.openxmlformats.org/presentationml/2006/ole">
-            <mc:AlternateContent xmlns:mc="http://schemas.openxmlformats.org/markup-compatibility/2006">
-              <mc:Choice xmlns:v="urn:schemas-microsoft-com:vml" Requires="v">
-                <p:oleObj spid="_x0000_s7" name="" r:id="rId3" imgW="3343275" imgH="3343275" progId="Excel.Sheet.12">
-                  <p:link updateAutomatic="1"/>
-                </p:oleObj>
-              </mc:Choice>
-              <mc:Fallback>
-                <p:oleObj name="" r:id="rId3" imgW="3343275" imgH="3343275" progId="Excel.Sheet.12">
-                  <p:link updateAutomatic="1"/>
-                  <p:pic>
-                    <p:nvPicPr>
-                      <p:cNvPr id="0" name="图片 6"/>
-                      <p:cNvPicPr/>
-                      <p:nvPr/>
-                    </p:nvPicPr>
-                    <p:blipFill>
-                      <a:blip r:embed="rId4"/>
-                      <a:srcRect l="532" t="228" r="1443" b="1481"/>
-                      <a:stretch>
-                        <a:fillRect/>
-                      </a:stretch>
-                    </p:blipFill>
-                    <p:spPr>
-                      <a:xfrm>
-                        <a:off x="9504918" y="4018889"/>
-                        <a:ext cx="2494280" cy="2499995"/>
-                      </a:xfrm>
-                      <a:prstGeom prst="rect">
-                        <a:avLst/>
-                      </a:prstGeom>
-                    </p:spPr>
-                  </p:pic>
-                </p:oleObj>
-              </mc:Fallback>
-            </mc:AlternateContent>
-          </a:graphicData>
-        </a:graphic>
-      </p:graphicFrame>
-      <p:graphicFrame>
-        <p:nvGraphicFramePr>
-          <p:cNvPr id="4" name="对象 3"/>
-          <p:cNvGraphicFramePr>
-            <a:graphicFrameLocks noChangeAspect="1"/>
-          </p:cNvGraphicFramePr>
-          <p:nvPr/>
-        </p:nvGraphicFramePr>
-        <p:xfrm>
-          <a:off x="6027420" y="4135411"/>
-          <a:ext cx="2713196" cy="1074420"/>
-        </p:xfrm>
-        <a:graphic>
-          <a:graphicData uri="http://schemas.openxmlformats.org/presentationml/2006/ole">
-            <mc:AlternateContent xmlns:mc="http://schemas.openxmlformats.org/markup-compatibility/2006">
-              <mc:Choice xmlns:v="urn:schemas-microsoft-com:vml" Requires="v">
-                <p:oleObj spid="_x0000_s5" name="" r:id="rId5" imgW="2152650" imgH="847725" progId="Excel.Sheet.12">
-                  <p:link updateAutomatic="1"/>
-                </p:oleObj>
-              </mc:Choice>
-              <mc:Fallback>
-                <p:oleObj name="" r:id="rId5" imgW="2152650" imgH="847725" progId="Excel.Sheet.12">
-                  <p:link updateAutomatic="1"/>
-                  <p:pic>
-                    <p:nvPicPr>
-                      <p:cNvPr id="0" name="图片 4"/>
-                      <p:cNvPicPr/>
-                      <p:nvPr/>
-                    </p:nvPicPr>
-                    <p:blipFill>
-                      <a:blip r:embed="rId6"/>
-                      <a:srcRect l="1613" t="1164" r="1681" b="1595"/>
-                      <a:stretch>
-                        <a:fillRect/>
-                      </a:stretch>
-                    </p:blipFill>
-                    <p:spPr>
-                      <a:xfrm>
-                        <a:off x="6027420" y="4135411"/>
-                        <a:ext cx="2713196" cy="1074420"/>
-                      </a:xfrm>
-                      <a:prstGeom prst="rect">
-                        <a:avLst/>
-                      </a:prstGeom>
-                    </p:spPr>
-                  </p:pic>
-                </p:oleObj>
-              </mc:Fallback>
-            </mc:AlternateContent>
-          </a:graphicData>
-        </a:graphic>
-      </p:graphicFrame>
-      <p:graphicFrame>
-        <p:nvGraphicFramePr>
-          <p:cNvPr id="12" name="对象 11"/>
-          <p:cNvGraphicFramePr>
-            <a:graphicFrameLocks noChangeAspect="1"/>
-          </p:cNvGraphicFramePr>
-          <p:nvPr/>
-        </p:nvGraphicFramePr>
-        <p:xfrm>
-          <a:off x="7150418" y="7193889"/>
-          <a:ext cx="466725" cy="401479"/>
-        </p:xfrm>
-        <a:graphic>
-          <a:graphicData uri="http://schemas.openxmlformats.org/presentationml/2006/ole">
-            <mc:AlternateContent xmlns:mc="http://schemas.openxmlformats.org/markup-compatibility/2006">
-              <mc:Choice xmlns:v="urn:schemas-microsoft-com:vml" Requires="v">
-                <p:oleObj spid="_x0000_s13" name="" r:id="rId7" imgW="476250" imgH="409575" progId="Excel.Sheet.12">
-                  <p:link updateAutomatic="1"/>
-                </p:oleObj>
-              </mc:Choice>
-              <mc:Fallback>
-                <p:oleObj name="" r:id="rId7" imgW="476250" imgH="409575" progId="Excel.Sheet.12">
-                  <p:link updateAutomatic="1"/>
-                  <p:pic>
-                    <p:nvPicPr>
-                      <p:cNvPr id="0" name="图片 12"/>
-                      <p:cNvPicPr/>
-                      <p:nvPr/>
-                    </p:nvPicPr>
-                    <p:blipFill>
-                      <a:blip r:embed="rId8"/>
-                      <a:stretch>
-                        <a:fillRect/>
-                      </a:stretch>
-                    </p:blipFill>
-                    <p:spPr>
-                      <a:xfrm>
-                        <a:off x="7150418" y="7193889"/>
-                        <a:ext cx="466725" cy="401479"/>
-                      </a:xfrm>
-                      <a:prstGeom prst="rect">
-                        <a:avLst/>
-                      </a:prstGeom>
-                    </p:spPr>
-                  </p:pic>
-                </p:oleObj>
-              </mc:Fallback>
-            </mc:AlternateContent>
-          </a:graphicData>
-        </a:graphic>
-      </p:graphicFrame>
-    </p:spTree>
-    <p:custDataLst>
-      <p:tags r:id="rId9"/>
-    </p:custDataLst>
-  </p:cSld>
-  <p:clrMapOvr>
-    <a:masterClrMapping/>
-  </p:clrMapOvr>
-</p:sld>
-</file>
-
-<file path=ppt/slides/slide2.xml><?xml version="1.0" encoding="utf-8"?>
-<p:sld xmlns:a="http://schemas.openxmlformats.org/drawingml/2006/main" xmlns:r="http://schemas.openxmlformats.org/officeDocument/2006/relationships" xmlns:p="http://schemas.openxmlformats.org/presentationml/2006/main">
-  <p:cSld>
-    <p:spTree>
-      <p:nvGrpSpPr>
-        <p:cNvPr id="1" name=""/>
-        <p:cNvGrpSpPr/>
-        <p:nvPr/>
-      </p:nvGrpSpPr>
-      <p:grpSpPr>
-        <a:xfrm>
-          <a:off x="0" y="0"/>
-          <a:ext cx="0" cy="0"/>
-          <a:chOff x="0" y="0"/>
-          <a:chExt cx="0" cy="0"/>
-        </a:xfrm>
-      </p:grpSpPr>
-      <p:pic>
-        <p:nvPicPr>
-          <p:cNvPr id="50" name="图片 49" descr="背景图片"/>
-          <p:cNvPicPr>
-            <a:picLocks noChangeAspect="1"/>
-          </p:cNvPicPr>
-          <p:nvPr/>
-        </p:nvPicPr>
-        <p:blipFill>
-          <a:blip r:embed="rId1"/>
-          <a:stretch>
-            <a:fillRect/>
-          </a:stretch>
-        </p:blipFill>
-        <p:spPr>
-          <a:xfrm>
             <a:off x="0" y="0"/>
             <a:ext cx="18337530" cy="10288905"/>
           </a:xfrm>
@@ -4371,7 +3449,7 @@
               <a:buFontTx/>
             </a:pPr>
             <a:r>
-              <a:rPr lang="zh-CN" altLang="en-US" sz="3600">
+              <a:rPr lang="zh-CN" altLang="en-US" sz="3200">
                 <a:ln>
                   <a:noFill/>
                 </a:ln>
@@ -4391,7 +3469,7 @@
               </a:rPr>
               <a:t>服务器：</a:t>
             </a:r>
-            <a:endParaRPr lang="zh-CN" altLang="en-US" sz="3600">
+            <a:endParaRPr lang="zh-CN" altLang="en-US" sz="3200">
               <a:ln>
                 <a:noFill/>
               </a:ln>
@@ -4417,7 +3495,7 @@
               </a:spcBef>
             </a:pPr>
             <a:r>
-              <a:rPr lang="zh-CN" altLang="en-US" sz="3600">
+              <a:rPr lang="zh-CN" altLang="en-US" sz="3200">
                 <a:ln>
                   <a:noFill/>
                 </a:ln>
@@ -4438,7 +3516,7 @@
               <a:t>地</a:t>
             </a:r>
             <a:r>
-              <a:rPr lang="en-US" altLang="zh-CN" sz="3600">
+              <a:rPr lang="en-US" altLang="zh-CN" sz="3200">
                 <a:ln>
                   <a:noFill/>
                 </a:ln>
@@ -4459,7 +3537,7 @@
               <a:t>   </a:t>
             </a:r>
             <a:r>
-              <a:rPr lang="zh-CN" altLang="en-US" sz="3600">
+              <a:rPr lang="zh-CN" altLang="en-US" sz="3200">
                 <a:ln>
                   <a:noFill/>
                 </a:ln>
@@ -4479,7 +3557,7 @@
               </a:rPr>
               <a:t>区：</a:t>
             </a:r>
-            <a:endParaRPr lang="zh-CN" altLang="en-US" sz="3600">
+            <a:endParaRPr lang="zh-CN" altLang="en-US" sz="3200">
               <a:ln>
                 <a:noFill/>
               </a:ln>
@@ -4508,7 +3586,7 @@
               <a:buFontTx/>
             </a:pPr>
             <a:r>
-              <a:rPr lang="zh-CN" altLang="en-US" sz="3600">
+              <a:rPr lang="zh-CN" altLang="en-US" sz="3200">
                 <a:ln>
                   <a:noFill/>
                 </a:ln>
@@ -4529,7 +3607,7 @@
               <a:t>协  </a:t>
             </a:r>
             <a:r>
-              <a:rPr lang="en-US" altLang="zh-CN" sz="3600">
+              <a:rPr lang="en-US" altLang="zh-CN" sz="3200">
                 <a:ln>
                   <a:noFill/>
                 </a:ln>
@@ -4550,7 +3628,7 @@
               <a:t> </a:t>
             </a:r>
             <a:r>
-              <a:rPr lang="zh-CN" altLang="en-US" sz="3600">
+              <a:rPr lang="zh-CN" altLang="en-US" sz="3200">
                 <a:ln>
                   <a:noFill/>
                 </a:ln>
@@ -4570,7 +3648,7 @@
               </a:rPr>
               <a:t>议：</a:t>
             </a:r>
-            <a:endParaRPr lang="zh-CN" altLang="en-US" sz="3600">
+            <a:endParaRPr lang="zh-CN" altLang="en-US" sz="3200">
               <a:ln>
                 <a:noFill/>
               </a:ln>
@@ -4598,7 +3676,7 @@
               <a:buSzTx/>
               <a:buFontTx/>
             </a:pPr>
-            <a:endParaRPr lang="en-US" altLang="zh-CN" sz="3600">
+            <a:endParaRPr lang="en-US" altLang="zh-CN" sz="3200">
               <a:ln>
                 <a:noFill/>
               </a:ln>
@@ -5557,27 +4635,6 @@
 </file>
 
 <file path=ppt/tags/tag63.xml><?xml version="1.0" encoding="utf-8"?>
-<p:tagLst xmlns:p="http://schemas.openxmlformats.org/presentationml/2006/main">
-  <p:tag name="KSO_WM_SLIDE_ID" val="custom20205081_1"/>
-  <p:tag name="KSO_WM_TEMPLATE_SUBCATEGORY" val="19"/>
-  <p:tag name="KSO_WM_TEMPLATE_MASTER_TYPE" val="0"/>
-  <p:tag name="KSO_WM_TEMPLATE_COLOR_TYPE" val="1"/>
-  <p:tag name="KSO_WM_SLIDE_TYPE" val="title"/>
-  <p:tag name="KSO_WM_SLIDE_SUBTYPE" val="defaultBlank"/>
-  <p:tag name="KSO_WM_SLIDE_ITEM_CNT" val="0"/>
-  <p:tag name="KSO_WM_SLIDE_INDEX" val="1"/>
-  <p:tag name="KSO_WM_TAG_VERSION" val="1.0"/>
-  <p:tag name="KSO_WM_BEAUTIFY_FLAG" val="#wm#"/>
-  <p:tag name="KSO_WM_TEMPLATE_CATEGORY" val="custom"/>
-  <p:tag name="KSO_WM_TEMPLATE_INDEX" val="20205081"/>
-  <p:tag name="KSO_WM_SLIDE_LAYOUT" val="a_b"/>
-  <p:tag name="KSO_WM_SLIDE_LAYOUT_CNT" val="1_1"/>
-  <p:tag name="KSO_WM_UNIT_SHOW_EDIT_AREA_INDICATION" val="1"/>
-  <p:tag name="KSO_WM_TEMPLATE_THUMBS_INDEX" val="1、4、7、12、13、14、15、16、17、18、20、24、25、28、33、36、40、43、44"/>
-</p:tagLst>
-</file>
-
-<file path=ppt/tags/tag64.xml><?xml version="1.0" encoding="utf-8"?>
 <p:tagLst xmlns:p="http://schemas.openxmlformats.org/presentationml/2006/main">
   <p:tag name="KSO_WM_SLIDE_ID" val="custom20205081_1"/>
   <p:tag name="KSO_WM_TEMPLATE_SUBCATEGORY" val="19"/>

--- a/youtube_live/local/直播画面-PPT.pptx
+++ b/youtube_live/local/直播画面-PPT.pptx
@@ -3111,7 +3111,7 @@
         </p:nvSpPr>
         <p:spPr>
           <a:xfrm>
-            <a:off x="3830955" y="3461385"/>
+            <a:off x="3830955" y="3168015"/>
             <a:ext cx="4712335" cy="4723130"/>
           </a:xfrm>
           <a:prstGeom prst="roundRect">
@@ -3319,7 +3319,7 @@
         </p:nvSpPr>
         <p:spPr>
           <a:xfrm>
-            <a:off x="3832225" y="6343650"/>
+            <a:off x="3832225" y="6050280"/>
             <a:ext cx="4711065" cy="1479550"/>
           </a:xfrm>
           <a:prstGeom prst="rect">
@@ -3420,7 +3420,7 @@
         </p:nvSpPr>
         <p:spPr>
           <a:xfrm>
-            <a:off x="3830320" y="3848100"/>
+            <a:off x="3830320" y="3554730"/>
             <a:ext cx="4711700" cy="2132330"/>
           </a:xfrm>
           <a:prstGeom prst="rect">
@@ -3810,7 +3810,7 @@
         </p:nvSpPr>
         <p:spPr>
           <a:xfrm>
-            <a:off x="9790430" y="3461385"/>
+            <a:off x="9790430" y="3168015"/>
             <a:ext cx="4712335" cy="4723130"/>
           </a:xfrm>
           <a:prstGeom prst="roundRect">
